--- a/SRM_Claudes_Plan_02.pptx
+++ b/SRM_Claudes_Plan_02.pptx
@@ -4276,7 +4276,7 @@
                   <a:srgbClr val="1A4B8C"/>
                 </a:solidFill>
               </a:rPr>
-              <a:t>Hemish Jain</a:t>
+              <a:t>Hemish Jain (hj0012@srmist.edu.in)</a:t>
             </a:r>
           </a:p>
           <a:p>
@@ -4299,7 +4299,7 @@
                   <a:srgbClr val="1A4B8C"/>
                 </a:solidFill>
               </a:rPr>
-              <a:t>Mridul Mathur</a:t>
+              <a:t>Mridul Mathur (mm4956@srmist.edu.in)</a:t>
             </a:r>
           </a:p>
           <a:p>
